--- a/RL/Course-project/Course project.pptx
+++ b/RL/Course-project/Course project.pptx
@@ -131,7 +131,7 @@
           <a:p>
             <a:fld id="{CED1C788-56A1-2E45-A024-5C42A74F7F0E}" type="datetimeFigureOut">
               <a:rPr lang="en-US" smtClean="0"/>
-              <a:t>8/12/24</a:t>
+              <a:t>11/20/24</a:t>
             </a:fld>
             <a:endParaRPr lang="en-US"/>
           </a:p>
@@ -2077,7 +2077,7 @@
           <a:p>
             <a:fld id="{1D8BD707-D9CF-40AE-B4C6-C98DA3205C09}" type="datetimeFigureOut">
               <a:rPr lang="en-US"/>
-              <a:t>8/12/24</a:t>
+              <a:t>11/20/24</a:t>
             </a:fld>
             <a:endParaRPr lang="en-US"/>
           </a:p>
@@ -2254,7 +2254,7 @@
           <a:p>
             <a:fld id="{1D8BD707-D9CF-40AE-B4C6-C98DA3205C09}" type="datetimeFigureOut">
               <a:rPr lang="en-US"/>
-              <a:t>8/12/24</a:t>
+              <a:t>11/20/24</a:t>
             </a:fld>
             <a:endParaRPr lang="en-US"/>
           </a:p>
@@ -2480,7 +2480,7 @@
           <a:p>
             <a:fld id="{1D8BD707-D9CF-40AE-B4C6-C98DA3205C09}" type="datetimeFigureOut">
               <a:rPr lang="en-US"/>
-              <a:t>8/12/24</a:t>
+              <a:t>11/20/24</a:t>
             </a:fld>
             <a:endParaRPr lang="en-US"/>
           </a:p>
@@ -2658,7 +2658,7 @@
           <a:p>
             <a:fld id="{1D8BD707-D9CF-40AE-B4C6-C98DA3205C09}" type="datetimeFigureOut">
               <a:rPr lang="en-US"/>
-              <a:t>8/12/24</a:t>
+              <a:t>11/20/24</a:t>
             </a:fld>
             <a:endParaRPr lang="en-US"/>
           </a:p>
@@ -2777,7 +2777,7 @@
           <a:p>
             <a:fld id="{1D8BD707-D9CF-40AE-B4C6-C98DA3205C09}" type="datetimeFigureOut">
               <a:rPr lang="en-US"/>
-              <a:t>8/12/24</a:t>
+              <a:t>11/20/24</a:t>
             </a:fld>
             <a:endParaRPr lang="en-US"/>
           </a:p>
@@ -4929,7 +4929,7 @@
           <a:p>
             <a:fld id="{1D8BD707-D9CF-40AE-B4C6-C98DA3205C09}" type="datetimeFigureOut">
               <a:rPr lang="en-US"/>
-              <a:t>8/12/24</a:t>
+              <a:t>11/20/24</a:t>
             </a:fld>
             <a:endParaRPr lang="en-US"/>
           </a:p>
@@ -5680,7 +5680,14 @@
                 <a:latin typeface="Calibri"/>
                 <a:cs typeface="Calibri"/>
               </a:rPr>
-              <a:t>12</a:t>
+              <a:t>1</a:t>
+            </a:r>
+            <a:r>
+              <a:rPr lang="en-US" sz="1400" dirty="0">
+                <a:latin typeface="Calibri"/>
+                <a:cs typeface="Calibri"/>
+              </a:rPr>
+              <a:t>8</a:t>
             </a:r>
             <a:r>
               <a:rPr sz="1400" dirty="0">
@@ -5690,11 +5697,11 @@
               <a:t>.</a:t>
             </a:r>
             <a:r>
-              <a:rPr lang="ru-RU" sz="1400" dirty="0">
+              <a:rPr lang="en-US" sz="1400" dirty="0">
                 <a:latin typeface="Calibri"/>
                 <a:cs typeface="Calibri"/>
               </a:rPr>
-              <a:t>08</a:t>
+              <a:t>12</a:t>
             </a:r>
             <a:r>
               <a:rPr sz="1400" spc="-40" dirty="0">
@@ -5702,132 +5709,6 @@
                 <a:cs typeface="Calibri"/>
               </a:rPr>
               <a:t> </a:t>
-            </a:r>
-            <a:r>
-              <a:rPr sz="1400" spc="-50" dirty="0">
-                <a:latin typeface="Calibri"/>
-                <a:cs typeface="Calibri"/>
-              </a:rPr>
-              <a:t>-</a:t>
-            </a:r>
-            <a:endParaRPr sz="1400" dirty="0">
-              <a:latin typeface="Calibri"/>
-              <a:cs typeface="Calibri"/>
-            </a:endParaRPr>
-          </a:p>
-        </p:txBody>
-      </p:sp>
-      <p:sp>
-        <p:nvSpPr>
-          <p:cNvPr id="21" name="object 21"/>
-          <p:cNvSpPr txBox="1"/>
-          <p:nvPr/>
-        </p:nvSpPr>
-        <p:spPr>
-          <a:xfrm>
-            <a:off x="76200" y="2410854"/>
-            <a:ext cx="1688144" cy="443711"/>
-          </a:xfrm>
-          <a:prstGeom prst="rect">
-            <a:avLst/>
-          </a:prstGeom>
-        </p:spPr>
-        <p:txBody>
-          <a:bodyPr vert="horz" wrap="square" lIns="0" tIns="12700" rIns="0" bIns="0" rtlCol="0">
-            <a:spAutoFit/>
-          </a:bodyPr>
-          <a:lstStyle/>
-          <a:p>
-            <a:pPr marL="12700" algn="r">
-              <a:lnSpc>
-                <a:spcPct val="100000"/>
-              </a:lnSpc>
-              <a:spcBef>
-                <a:spcPts val="100"/>
-              </a:spcBef>
-            </a:pPr>
-            <a:r>
-              <a:rPr lang="ru-RU" sz="1400" dirty="0">
-                <a:latin typeface="Calibri"/>
-                <a:cs typeface="Calibri"/>
-              </a:rPr>
-              <a:t>Варианты </a:t>
-            </a:r>
-            <a:br>
-              <a:rPr lang="ru-RU" sz="1400" dirty="0">
-                <a:latin typeface="Calibri"/>
-                <a:cs typeface="Calibri"/>
-              </a:rPr>
-            </a:br>
-            <a:r>
-              <a:rPr lang="ru-RU" sz="1400" dirty="0">
-                <a:latin typeface="Calibri"/>
-                <a:cs typeface="Calibri"/>
-              </a:rPr>
-              <a:t>01/03.10 </a:t>
-            </a:r>
-            <a:r>
-              <a:rPr sz="1400" spc="-50" dirty="0">
-                <a:latin typeface="Calibri"/>
-                <a:cs typeface="Calibri"/>
-              </a:rPr>
-              <a:t>-</a:t>
-            </a:r>
-            <a:endParaRPr sz="1400" dirty="0">
-              <a:latin typeface="Calibri"/>
-              <a:cs typeface="Calibri"/>
-            </a:endParaRPr>
-          </a:p>
-        </p:txBody>
-      </p:sp>
-      <p:sp>
-        <p:nvSpPr>
-          <p:cNvPr id="22" name="object 22"/>
-          <p:cNvSpPr txBox="1"/>
-          <p:nvPr/>
-        </p:nvSpPr>
-        <p:spPr>
-          <a:xfrm>
-            <a:off x="76200" y="2893531"/>
-            <a:ext cx="1688144" cy="443711"/>
-          </a:xfrm>
-          <a:prstGeom prst="rect">
-            <a:avLst/>
-          </a:prstGeom>
-        </p:spPr>
-        <p:txBody>
-          <a:bodyPr vert="horz" wrap="square" lIns="0" tIns="12700" rIns="0" bIns="0" rtlCol="0">
-            <a:spAutoFit/>
-          </a:bodyPr>
-          <a:lstStyle/>
-          <a:p>
-            <a:pPr marL="12700" algn="r">
-              <a:lnSpc>
-                <a:spcPct val="100000"/>
-              </a:lnSpc>
-              <a:spcBef>
-                <a:spcPts val="100"/>
-              </a:spcBef>
-            </a:pPr>
-            <a:r>
-              <a:rPr lang="ru-RU" sz="1400" dirty="0">
-                <a:latin typeface="Calibri"/>
-                <a:cs typeface="Calibri"/>
-              </a:rPr>
-              <a:t>Варианты </a:t>
-            </a:r>
-            <a:br>
-              <a:rPr lang="ru-RU" sz="1400" dirty="0">
-                <a:latin typeface="Calibri"/>
-                <a:cs typeface="Calibri"/>
-              </a:rPr>
-            </a:br>
-            <a:r>
-              <a:rPr lang="ru-RU" sz="1400" dirty="0">
-                <a:latin typeface="Calibri"/>
-                <a:cs typeface="Calibri"/>
-              </a:rPr>
-              <a:t>15/18.10 </a:t>
             </a:r>
             <a:r>
               <a:rPr sz="1400" spc="-50" dirty="0">
@@ -5879,18 +5760,11 @@
               </a:spcBef>
             </a:pPr>
             <a:r>
-              <a:rPr lang="ru-RU" sz="1400" dirty="0">
-                <a:latin typeface="Calibri"/>
-                <a:cs typeface="Calibri"/>
-              </a:rPr>
-              <a:t>1</a:t>
-            </a:r>
-            <a:r>
               <a:rPr lang="en-US" sz="1400" dirty="0">
                 <a:latin typeface="Calibri"/>
                 <a:cs typeface="Calibri"/>
               </a:rPr>
-              <a:t>9</a:t>
+              <a:t>20</a:t>
             </a:r>
             <a:r>
               <a:rPr sz="1400" dirty="0">
@@ -5904,14 +5778,7 @@
                 <a:latin typeface="Calibri"/>
                 <a:cs typeface="Calibri"/>
               </a:rPr>
-              <a:t>1</a:t>
-            </a:r>
-            <a:r>
-              <a:rPr lang="ru-RU" sz="1400" dirty="0">
-                <a:latin typeface="Calibri"/>
-                <a:cs typeface="Calibri"/>
-              </a:rPr>
-              <a:t>0</a:t>
+              <a:t>01</a:t>
             </a:r>
             <a:r>
               <a:rPr sz="1400" spc="-35" dirty="0">
@@ -8815,7 +8682,7 @@
                 <a:cs typeface="Roboto"/>
                 <a:sym typeface="Roboto"/>
               </a:rPr>
-              <a:t>6</a:t>
+              <a:t>9</a:t>
             </a:r>
             <a:endParaRPr sz="1500" dirty="0">
               <a:latin typeface="Roboto"/>
@@ -10347,6 +10214,65 @@
             </a:avLst>
           </a:prstGeom>
           <a:solidFill>
+            <a:schemeClr val="bg1">
+              <a:lumMod val="85000"/>
+            </a:schemeClr>
+          </a:solidFill>
+          <a:ln>
+            <a:noFill/>
+          </a:ln>
+          <a:effectLst>
+            <a:glow>
+              <a:schemeClr val="accent1">
+                <a:satMod val="175000"/>
+                <a:alpha val="40000"/>
+              </a:schemeClr>
+            </a:glow>
+          </a:effectLst>
+        </p:spPr>
+        <p:txBody>
+          <a:bodyPr spcFirstLastPara="1" wrap="square" lIns="162000" tIns="91425" rIns="162000" bIns="91425" anchor="ctr" anchorCtr="0">
+            <a:noAutofit/>
+          </a:bodyPr>
+          <a:lstStyle/>
+          <a:p>
+            <a:r>
+              <a:rPr lang="ru" sz="1600" dirty="0">
+                <a:solidFill>
+                  <a:srgbClr val="1F1F1F"/>
+                </a:solidFill>
+                <a:latin typeface="Google Sans"/>
+                <a:sym typeface="Roboto"/>
+              </a:rPr>
+              <a:t>Deep Reinforcement Learning</a:t>
+            </a:r>
+            <a:endParaRPr sz="1600" dirty="0">
+              <a:solidFill>
+                <a:srgbClr val="1F1F1F"/>
+              </a:solidFill>
+              <a:latin typeface="Google Sans"/>
+              <a:sym typeface="Roboto"/>
+            </a:endParaRPr>
+          </a:p>
+        </p:txBody>
+      </p:sp>
+      <p:sp>
+        <p:nvSpPr>
+          <p:cNvPr id="273" name="Google Shape;273;p44"/>
+          <p:cNvSpPr/>
+          <p:nvPr/>
+        </p:nvSpPr>
+        <p:spPr>
+          <a:xfrm>
+            <a:off x="4491135" y="1847803"/>
+            <a:ext cx="2917948" cy="579300"/>
+          </a:xfrm>
+          <a:prstGeom prst="roundRect">
+            <a:avLst>
+              <a:gd name="adj" fmla="val 16667"/>
+            </a:avLst>
+          </a:prstGeom>
+          <a:solidFill>
             <a:srgbClr val="FFD966"/>
           </a:solidFill>
           <a:ln>
@@ -10368,94 +10294,30 @@
           <a:lstStyle/>
           <a:p>
             <a:r>
-              <a:rPr lang="ru" sz="1600" dirty="0">
+              <a:rPr lang="en-US" sz="1600">
                 <a:solidFill>
                   <a:srgbClr val="1F1F1F"/>
                 </a:solidFill>
                 <a:latin typeface="Google Sans"/>
                 <a:sym typeface="Roboto"/>
               </a:rPr>
-              <a:t>Deep Reinforcement Learning</a:t>
-            </a:r>
-            <a:endParaRPr sz="1600" dirty="0">
-              <a:solidFill>
-                <a:srgbClr val="1F1F1F"/>
-              </a:solidFill>
-              <a:latin typeface="Google Sans"/>
-              <a:sym typeface="Roboto"/>
-            </a:endParaRPr>
-          </a:p>
-        </p:txBody>
-      </p:sp>
-      <p:sp>
-        <p:nvSpPr>
-          <p:cNvPr id="273" name="Google Shape;273;p44"/>
-          <p:cNvSpPr/>
-          <p:nvPr/>
-        </p:nvSpPr>
-        <p:spPr>
-          <a:xfrm>
-            <a:off x="4491135" y="1847803"/>
-            <a:ext cx="2917948" cy="579300"/>
-          </a:xfrm>
-          <a:prstGeom prst="roundRect">
-            <a:avLst>
-              <a:gd name="adj" fmla="val 16667"/>
-            </a:avLst>
-          </a:prstGeom>
-          <a:solidFill>
-            <a:srgbClr val="FFD966"/>
-          </a:solidFill>
-          <a:ln>
-            <a:noFill/>
-          </a:ln>
-        </p:spPr>
-        <p:txBody>
-          <a:bodyPr spcFirstLastPara="1" wrap="square" lIns="162000" tIns="91425" rIns="162000" bIns="91425" anchor="ctr" anchorCtr="0">
-            <a:noAutofit/>
-          </a:bodyPr>
-          <a:lstStyle/>
-          <a:p>
-            <a:pPr marL="0" lvl="0" indent="0" algn="l" rtl="0">
-              <a:spcBef>
-                <a:spcPts val="0"/>
-              </a:spcBef>
-              <a:spcAft>
-                <a:spcPts val="0"/>
-              </a:spcAft>
-              <a:buNone/>
-            </a:pPr>
-            <a:r>
-              <a:rPr lang="en-US" sz="1300" dirty="0">
-                <a:solidFill>
-                  <a:schemeClr val="dk1"/>
-                </a:solidFill>
-                <a:latin typeface="Roboto"/>
-                <a:ea typeface="Roboto"/>
-                <a:cs typeface="Roboto"/>
-                <a:sym typeface="Roboto"/>
-              </a:rPr>
               <a:t>Advanced </a:t>
             </a:r>
             <a:br>
-              <a:rPr lang="ru-RU" sz="1300" dirty="0">
-                <a:solidFill>
-                  <a:schemeClr val="dk1"/>
-                </a:solidFill>
-                <a:latin typeface="Roboto"/>
-                <a:ea typeface="Roboto"/>
-                <a:cs typeface="Roboto"/>
+              <a:rPr lang="ru-RU" sz="1600">
+                <a:solidFill>
+                  <a:srgbClr val="1F1F1F"/>
+                </a:solidFill>
+                <a:latin typeface="Google Sans"/>
                 <a:sym typeface="Roboto"/>
               </a:rPr>
             </a:br>
             <a:r>
-              <a:rPr lang="en-US" sz="1300" dirty="0">
-                <a:solidFill>
-                  <a:schemeClr val="dk1"/>
-                </a:solidFill>
-                <a:latin typeface="Roboto"/>
-                <a:ea typeface="Roboto"/>
-                <a:cs typeface="Roboto"/>
+              <a:rPr lang="en-US" sz="1600" dirty="0">
+                <a:solidFill>
+                  <a:srgbClr val="1F1F1F"/>
+                </a:solidFill>
+                <a:latin typeface="Google Sans"/>
                 <a:sym typeface="Roboto"/>
               </a:rPr>
               <a:t>Reinforcement Learning</a:t>
@@ -11284,7 +11146,7 @@
         </p:nvSpPr>
         <p:spPr>
           <a:xfrm>
-            <a:off x="2226713" y="2538194"/>
+            <a:off x="2226713" y="2440188"/>
             <a:ext cx="5698087" cy="396000"/>
           </a:xfrm>
           <a:prstGeom prst="roundRect">
@@ -11352,7 +11214,7 @@
         </p:nvSpPr>
         <p:spPr>
           <a:xfrm>
-            <a:off x="2226713" y="3184380"/>
+            <a:off x="2226713" y="2988368"/>
             <a:ext cx="5698087" cy="396000"/>
           </a:xfrm>
           <a:prstGeom prst="roundRect">
@@ -11417,7 +11279,7 @@
         </p:nvSpPr>
         <p:spPr>
           <a:xfrm>
-            <a:off x="2226713" y="3830566"/>
+            <a:off x="2226712" y="3536548"/>
             <a:ext cx="5698087" cy="396000"/>
           </a:xfrm>
           <a:prstGeom prst="roundRect">
@@ -11530,8 +11392,8 @@
         </p:nvCxnSpPr>
         <p:spPr>
           <a:xfrm rot="16200000" flipH="1">
-            <a:off x="1490511" y="1999991"/>
-            <a:ext cx="1052475" cy="419929"/>
+            <a:off x="1539514" y="1950988"/>
+            <a:ext cx="954469" cy="419929"/>
           </a:xfrm>
           <a:prstGeom prst="bentConnector2">
             <a:avLst/>
@@ -11576,8 +11438,8 @@
         </p:nvCxnSpPr>
         <p:spPr>
           <a:xfrm rot="16200000" flipH="1">
-            <a:off x="1167418" y="2323084"/>
-            <a:ext cx="1698661" cy="419929"/>
+            <a:off x="1265424" y="2225078"/>
+            <a:ext cx="1502649" cy="419929"/>
           </a:xfrm>
           <a:prstGeom prst="bentConnector2">
             <a:avLst/>
@@ -11622,8 +11484,8 @@
         </p:nvCxnSpPr>
         <p:spPr>
           <a:xfrm rot="16200000" flipH="1">
-            <a:off x="844325" y="2646177"/>
-            <a:ext cx="2344847" cy="419929"/>
+            <a:off x="991334" y="2499169"/>
+            <a:ext cx="2050829" cy="419928"/>
           </a:xfrm>
           <a:prstGeom prst="bentConnector2">
             <a:avLst/>
@@ -11851,7 +11713,7 @@
         </p:nvSpPr>
         <p:spPr>
           <a:xfrm>
-            <a:off x="2226713" y="4476750"/>
+            <a:off x="2226711" y="4084728"/>
             <a:ext cx="5698087" cy="396000"/>
           </a:xfrm>
           <a:prstGeom prst="roundRect">
@@ -11921,8 +11783,117 @@
         </p:nvCxnSpPr>
         <p:spPr>
           <a:xfrm rot="16200000" flipH="1">
-            <a:off x="521233" y="2969269"/>
-            <a:ext cx="2991031" cy="419929"/>
+            <a:off x="717243" y="2773259"/>
+            <a:ext cx="2599009" cy="419927"/>
+          </a:xfrm>
+          <a:prstGeom prst="bentConnector2">
+            <a:avLst/>
+          </a:prstGeom>
+          <a:ln>
+            <a:solidFill>
+              <a:schemeClr val="tx1"/>
+            </a:solidFill>
+            <a:tailEnd type="triangle"/>
+          </a:ln>
+        </p:spPr>
+        <p:style>
+          <a:lnRef idx="1">
+            <a:schemeClr val="accent1"/>
+          </a:lnRef>
+          <a:fillRef idx="0">
+            <a:schemeClr val="accent1"/>
+          </a:fillRef>
+          <a:effectRef idx="0">
+            <a:schemeClr val="accent1"/>
+          </a:effectRef>
+          <a:fontRef idx="minor">
+            <a:schemeClr val="tx1"/>
+          </a:fontRef>
+        </p:style>
+      </p:cxnSp>
+      <p:sp>
+        <p:nvSpPr>
+          <p:cNvPr id="17" name="Google Shape;271;p44">
+            <a:extLst>
+              <a:ext uri="{FF2B5EF4-FFF2-40B4-BE49-F238E27FC236}">
+                <a16:creationId xmlns:a16="http://schemas.microsoft.com/office/drawing/2014/main" id="{DFE4BD41-9927-E140-AC4F-48E39676A188}"/>
+              </a:ext>
+            </a:extLst>
+          </p:cNvPr>
+          <p:cNvSpPr/>
+          <p:nvPr/>
+        </p:nvSpPr>
+        <p:spPr>
+          <a:xfrm>
+            <a:off x="2226710" y="4632908"/>
+            <a:ext cx="5698087" cy="396000"/>
+          </a:xfrm>
+          <a:prstGeom prst="roundRect">
+            <a:avLst>
+              <a:gd name="adj" fmla="val 16667"/>
+            </a:avLst>
+          </a:prstGeom>
+          <a:solidFill>
+            <a:srgbClr val="FFD966"/>
+          </a:solidFill>
+          <a:ln>
+            <a:noFill/>
+          </a:ln>
+          <a:effectLst>
+            <a:glow>
+              <a:schemeClr val="accent1">
+                <a:satMod val="175000"/>
+                <a:alpha val="40000"/>
+              </a:schemeClr>
+            </a:glow>
+          </a:effectLst>
+        </p:spPr>
+        <p:txBody>
+          <a:bodyPr spcFirstLastPara="1" wrap="square" lIns="162000" tIns="91425" rIns="162000" bIns="91425" anchor="ctr" anchorCtr="0">
+            <a:noAutofit/>
+          </a:bodyPr>
+          <a:lstStyle/>
+          <a:p>
+            <a:r>
+              <a:rPr lang="en-US" sz="1600" dirty="0">
+                <a:solidFill>
+                  <a:srgbClr val="1F1F1F"/>
+                </a:solidFill>
+                <a:latin typeface="Google Sans"/>
+                <a:sym typeface="Roboto"/>
+              </a:rPr>
+              <a:t>Decision transformers</a:t>
+            </a:r>
+            <a:endParaRPr lang="ru-RU" sz="1600" dirty="0">
+              <a:solidFill>
+                <a:srgbClr val="1F1F1F"/>
+              </a:solidFill>
+              <a:latin typeface="Google Sans"/>
+              <a:sym typeface="Roboto"/>
+            </a:endParaRPr>
+          </a:p>
+        </p:txBody>
+      </p:sp>
+      <p:cxnSp>
+        <p:nvCxnSpPr>
+          <p:cNvPr id="18" name="Elbow Connector 17">
+            <a:extLst>
+              <a:ext uri="{FF2B5EF4-FFF2-40B4-BE49-F238E27FC236}">
+                <a16:creationId xmlns:a16="http://schemas.microsoft.com/office/drawing/2014/main" id="{A588923E-D2E7-FB40-8553-A8CD8BDE147A}"/>
+              </a:ext>
+            </a:extLst>
+          </p:cNvPr>
+          <p:cNvCxnSpPr>
+            <a:cxnSpLocks/>
+            <a:stCxn id="271" idx="2"/>
+            <a:endCxn id="17" idx="1"/>
+          </p:cNvCxnSpPr>
+          <p:nvPr/>
+        </p:nvCxnSpPr>
+        <p:spPr>
+          <a:xfrm rot="16200000" flipH="1">
+            <a:off x="443153" y="3047350"/>
+            <a:ext cx="3147189" cy="419926"/>
           </a:xfrm>
           <a:prstGeom prst="bentConnector2">
             <a:avLst/>

--- a/RL/Course-project/Course project.pptx
+++ b/RL/Course-project/Course project.pptx
@@ -131,7 +131,7 @@
           <a:p>
             <a:fld id="{CED1C788-56A1-2E45-A024-5C42A74F7F0E}" type="datetimeFigureOut">
               <a:rPr lang="en-US" smtClean="0"/>
-              <a:t>11/20/24</a:t>
+              <a:t>2/25/25</a:t>
             </a:fld>
             <a:endParaRPr lang="en-US"/>
           </a:p>
@@ -2077,7 +2077,7 @@
           <a:p>
             <a:fld id="{1D8BD707-D9CF-40AE-B4C6-C98DA3205C09}" type="datetimeFigureOut">
               <a:rPr lang="en-US"/>
-              <a:t>11/20/24</a:t>
+              <a:t>2/25/25</a:t>
             </a:fld>
             <a:endParaRPr lang="en-US"/>
           </a:p>
@@ -2254,7 +2254,7 @@
           <a:p>
             <a:fld id="{1D8BD707-D9CF-40AE-B4C6-C98DA3205C09}" type="datetimeFigureOut">
               <a:rPr lang="en-US"/>
-              <a:t>11/20/24</a:t>
+              <a:t>2/25/25</a:t>
             </a:fld>
             <a:endParaRPr lang="en-US"/>
           </a:p>
@@ -2480,7 +2480,7 @@
           <a:p>
             <a:fld id="{1D8BD707-D9CF-40AE-B4C6-C98DA3205C09}" type="datetimeFigureOut">
               <a:rPr lang="en-US"/>
-              <a:t>11/20/24</a:t>
+              <a:t>2/25/25</a:t>
             </a:fld>
             <a:endParaRPr lang="en-US"/>
           </a:p>
@@ -2658,7 +2658,7 @@
           <a:p>
             <a:fld id="{1D8BD707-D9CF-40AE-B4C6-C98DA3205C09}" type="datetimeFigureOut">
               <a:rPr lang="en-US"/>
-              <a:t>11/20/24</a:t>
+              <a:t>2/25/25</a:t>
             </a:fld>
             <a:endParaRPr lang="en-US"/>
           </a:p>
@@ -2777,7 +2777,7 @@
           <a:p>
             <a:fld id="{1D8BD707-D9CF-40AE-B4C6-C98DA3205C09}" type="datetimeFigureOut">
               <a:rPr lang="en-US"/>
-              <a:t>11/20/24</a:t>
+              <a:t>2/25/25</a:t>
             </a:fld>
             <a:endParaRPr lang="en-US"/>
           </a:p>
@@ -4929,7 +4929,7 @@
           <a:p>
             <a:fld id="{1D8BD707-D9CF-40AE-B4C6-C98DA3205C09}" type="datetimeFigureOut">
               <a:rPr lang="en-US"/>
-              <a:t>11/20/24</a:t>
+              <a:t>2/25/25</a:t>
             </a:fld>
             <a:endParaRPr lang="en-US"/>
           </a:p>
@@ -5680,14 +5680,7 @@
                 <a:latin typeface="Calibri"/>
                 <a:cs typeface="Calibri"/>
               </a:rPr>
-              <a:t>1</a:t>
-            </a:r>
-            <a:r>
-              <a:rPr lang="en-US" sz="1400" dirty="0">
-                <a:latin typeface="Calibri"/>
-                <a:cs typeface="Calibri"/>
-              </a:rPr>
-              <a:t>8</a:t>
+              <a:t>25</a:t>
             </a:r>
             <a:r>
               <a:rPr sz="1400" dirty="0">
@@ -5697,11 +5690,11 @@
               <a:t>.</a:t>
             </a:r>
             <a:r>
-              <a:rPr lang="en-US" sz="1400" dirty="0">
+              <a:rPr lang="ru-RU" sz="1400" dirty="0">
                 <a:latin typeface="Calibri"/>
                 <a:cs typeface="Calibri"/>
               </a:rPr>
-              <a:t>12</a:t>
+              <a:t>02</a:t>
             </a:r>
             <a:r>
               <a:rPr sz="1400" spc="-40" dirty="0">
@@ -5760,11 +5753,11 @@
               </a:spcBef>
             </a:pPr>
             <a:r>
-              <a:rPr lang="en-US" sz="1400" dirty="0">
+              <a:rPr lang="ru-RU" sz="1400" dirty="0">
                 <a:latin typeface="Calibri"/>
                 <a:cs typeface="Calibri"/>
               </a:rPr>
-              <a:t>20</a:t>
+              <a:t>17</a:t>
             </a:r>
             <a:r>
               <a:rPr sz="1400" dirty="0">
@@ -5778,7 +5771,14 @@
                 <a:latin typeface="Calibri"/>
                 <a:cs typeface="Calibri"/>
               </a:rPr>
-              <a:t>01</a:t>
+              <a:t>0</a:t>
+            </a:r>
+            <a:r>
+              <a:rPr lang="ru-RU" sz="1400" dirty="0">
+                <a:latin typeface="Calibri"/>
+                <a:cs typeface="Calibri"/>
+              </a:rPr>
+              <a:t>4</a:t>
             </a:r>
             <a:r>
               <a:rPr sz="1400" spc="-35" dirty="0">
@@ -6517,6 +6517,216 @@
           </a:graphicData>
         </a:graphic>
       </p:graphicFrame>
+      <p:sp>
+        <p:nvSpPr>
+          <p:cNvPr id="19" name="object 22">
+            <a:extLst>
+              <a:ext uri="{FF2B5EF4-FFF2-40B4-BE49-F238E27FC236}">
+                <a16:creationId xmlns:a16="http://schemas.microsoft.com/office/drawing/2014/main" id="{EF229706-DE66-8E47-8018-514387F4B921}"/>
+              </a:ext>
+            </a:extLst>
+          </p:cNvPr>
+          <p:cNvSpPr txBox="1"/>
+          <p:nvPr/>
+        </p:nvSpPr>
+        <p:spPr>
+          <a:xfrm>
+            <a:off x="1233721" y="2973886"/>
+            <a:ext cx="595079" cy="228268"/>
+          </a:xfrm>
+          <a:prstGeom prst="rect">
+            <a:avLst/>
+          </a:prstGeom>
+        </p:spPr>
+        <p:txBody>
+          <a:bodyPr vert="horz" wrap="square" lIns="0" tIns="12700" rIns="0" bIns="0" rtlCol="0">
+            <a:spAutoFit/>
+          </a:bodyPr>
+          <a:lstStyle/>
+          <a:p>
+            <a:pPr marL="12700">
+              <a:lnSpc>
+                <a:spcPct val="100000"/>
+              </a:lnSpc>
+              <a:spcBef>
+                <a:spcPts val="100"/>
+              </a:spcBef>
+            </a:pPr>
+            <a:r>
+              <a:rPr lang="ru-RU" sz="1400" dirty="0">
+                <a:solidFill>
+                  <a:srgbClr val="FF0000"/>
+                </a:solidFill>
+                <a:latin typeface="Calibri"/>
+                <a:cs typeface="Calibri"/>
+              </a:rPr>
+              <a:t>16</a:t>
+            </a:r>
+            <a:r>
+              <a:rPr sz="1400" dirty="0">
+                <a:solidFill>
+                  <a:srgbClr val="FF0000"/>
+                </a:solidFill>
+                <a:latin typeface="Calibri"/>
+                <a:cs typeface="Calibri"/>
+              </a:rPr>
+              <a:t>.</a:t>
+            </a:r>
+            <a:r>
+              <a:rPr lang="en-US" sz="1400" dirty="0">
+                <a:solidFill>
+                  <a:srgbClr val="FF0000"/>
+                </a:solidFill>
+                <a:latin typeface="Calibri"/>
+                <a:cs typeface="Calibri"/>
+              </a:rPr>
+              <a:t>0</a:t>
+            </a:r>
+            <a:r>
+              <a:rPr lang="ru-RU" sz="1400" dirty="0">
+                <a:solidFill>
+                  <a:srgbClr val="FF0000"/>
+                </a:solidFill>
+                <a:latin typeface="Calibri"/>
+                <a:cs typeface="Calibri"/>
+              </a:rPr>
+              <a:t>4</a:t>
+            </a:r>
+            <a:r>
+              <a:rPr sz="1400" spc="-35" dirty="0">
+                <a:solidFill>
+                  <a:srgbClr val="FF0000"/>
+                </a:solidFill>
+                <a:latin typeface="Calibri"/>
+                <a:cs typeface="Calibri"/>
+              </a:rPr>
+              <a:t> </a:t>
+            </a:r>
+            <a:r>
+              <a:rPr lang="ru-RU" sz="1400" spc="-50" dirty="0">
+                <a:solidFill>
+                  <a:srgbClr val="FF0000"/>
+                </a:solidFill>
+                <a:latin typeface="Calibri"/>
+                <a:cs typeface="Calibri"/>
+              </a:rPr>
+              <a:t>?</a:t>
+            </a:r>
+            <a:endParaRPr sz="1400" dirty="0">
+              <a:solidFill>
+                <a:srgbClr val="FF0000"/>
+              </a:solidFill>
+              <a:latin typeface="Calibri"/>
+              <a:cs typeface="Calibri"/>
+            </a:endParaRPr>
+          </a:p>
+        </p:txBody>
+      </p:sp>
+      <p:sp>
+        <p:nvSpPr>
+          <p:cNvPr id="21" name="object 22">
+            <a:extLst>
+              <a:ext uri="{FF2B5EF4-FFF2-40B4-BE49-F238E27FC236}">
+                <a16:creationId xmlns:a16="http://schemas.microsoft.com/office/drawing/2014/main" id="{EF2DA713-AEF4-954B-8B47-5E276B7667F1}"/>
+              </a:ext>
+            </a:extLst>
+          </p:cNvPr>
+          <p:cNvSpPr txBox="1"/>
+          <p:nvPr/>
+        </p:nvSpPr>
+        <p:spPr>
+          <a:xfrm>
+            <a:off x="1227882" y="2477676"/>
+            <a:ext cx="595079" cy="228268"/>
+          </a:xfrm>
+          <a:prstGeom prst="rect">
+            <a:avLst/>
+          </a:prstGeom>
+        </p:spPr>
+        <p:txBody>
+          <a:bodyPr vert="horz" wrap="square" lIns="0" tIns="12700" rIns="0" bIns="0" rtlCol="0">
+            <a:spAutoFit/>
+          </a:bodyPr>
+          <a:lstStyle/>
+          <a:p>
+            <a:pPr marL="12700">
+              <a:lnSpc>
+                <a:spcPct val="100000"/>
+              </a:lnSpc>
+              <a:spcBef>
+                <a:spcPts val="100"/>
+              </a:spcBef>
+            </a:pPr>
+            <a:r>
+              <a:rPr lang="ru-RU" sz="1400" dirty="0">
+                <a:solidFill>
+                  <a:srgbClr val="FF0000"/>
+                </a:solidFill>
+                <a:latin typeface="Calibri"/>
+                <a:cs typeface="Calibri"/>
+              </a:rPr>
+              <a:t>01</a:t>
+            </a:r>
+            <a:r>
+              <a:rPr sz="1400" dirty="0">
+                <a:solidFill>
+                  <a:srgbClr val="FF0000"/>
+                </a:solidFill>
+                <a:latin typeface="Calibri"/>
+                <a:cs typeface="Calibri"/>
+              </a:rPr>
+              <a:t>.</a:t>
+            </a:r>
+            <a:r>
+              <a:rPr lang="en-US" sz="1400" dirty="0">
+                <a:solidFill>
+                  <a:srgbClr val="FF0000"/>
+                </a:solidFill>
+                <a:latin typeface="Calibri"/>
+                <a:cs typeface="Calibri"/>
+              </a:rPr>
+              <a:t>0</a:t>
+            </a:r>
+            <a:r>
+              <a:rPr lang="ru-RU" sz="1400" dirty="0">
+                <a:solidFill>
+                  <a:srgbClr val="FF0000"/>
+                </a:solidFill>
+                <a:latin typeface="Calibri"/>
+                <a:cs typeface="Calibri"/>
+              </a:rPr>
+              <a:t>4</a:t>
+            </a:r>
+            <a:r>
+              <a:rPr sz="1400" spc="-35" dirty="0">
+                <a:solidFill>
+                  <a:srgbClr val="FF0000"/>
+                </a:solidFill>
+                <a:latin typeface="Calibri"/>
+                <a:cs typeface="Calibri"/>
+              </a:rPr>
+              <a:t> </a:t>
+            </a:r>
+            <a:r>
+              <a:rPr lang="ru-RU" sz="1400" spc="-50" dirty="0">
+                <a:solidFill>
+                  <a:srgbClr val="FF0000"/>
+                </a:solidFill>
+                <a:latin typeface="Calibri"/>
+                <a:cs typeface="Calibri"/>
+              </a:rPr>
+              <a:t>?</a:t>
+            </a:r>
+            <a:endParaRPr sz="1400" dirty="0">
+              <a:solidFill>
+                <a:srgbClr val="FF0000"/>
+              </a:solidFill>
+              <a:latin typeface="Calibri"/>
+              <a:cs typeface="Calibri"/>
+            </a:endParaRPr>
+          </a:p>
+        </p:txBody>
+      </p:sp>
     </p:spTree>
   </p:cSld>
   <p:clrMapOvr>
@@ -8553,7 +8763,7 @@
         <p:spPr>
           <a:xfrm>
             <a:off x="1654525" y="2049300"/>
-            <a:ext cx="2475300" cy="877200"/>
+            <a:ext cx="2475300" cy="646300"/>
           </a:xfrm>
           <a:prstGeom prst="rect">
             <a:avLst/>
@@ -8612,77 +8822,6 @@
                 <a:sym typeface="Roboto"/>
               </a:rPr>
               <a:t>в учебной группе </a:t>
-            </a:r>
-            <a:endParaRPr sz="1500" dirty="0">
-              <a:latin typeface="Roboto"/>
-              <a:ea typeface="Roboto"/>
-              <a:cs typeface="Roboto"/>
-              <a:sym typeface="Roboto"/>
-            </a:endParaRPr>
-          </a:p>
-          <a:p>
-            <a:pPr marL="0" lvl="0" indent="0" algn="l" rtl="0">
-              <a:spcBef>
-                <a:spcPts val="0"/>
-              </a:spcBef>
-              <a:spcAft>
-                <a:spcPts val="0"/>
-              </a:spcAft>
-              <a:buNone/>
-            </a:pPr>
-            <a:r>
-              <a:rPr lang="ru" sz="1500" dirty="0">
-                <a:latin typeface="Roboto"/>
-                <a:ea typeface="Roboto"/>
-                <a:cs typeface="Roboto"/>
-                <a:sym typeface="Roboto"/>
-              </a:rPr>
-              <a:t>#</a:t>
-            </a:r>
-            <a:r>
-              <a:rPr lang="en-US" sz="1500" b="1" dirty="0">
-                <a:latin typeface="Roboto"/>
-                <a:ea typeface="Roboto"/>
-                <a:cs typeface="Roboto"/>
-                <a:sym typeface="Roboto"/>
-              </a:rPr>
-              <a:t>RL-202</a:t>
-            </a:r>
-            <a:r>
-              <a:rPr lang="ru-RU" sz="1500" b="1" dirty="0">
-                <a:latin typeface="Roboto"/>
-                <a:ea typeface="Roboto"/>
-                <a:cs typeface="Roboto"/>
-                <a:sym typeface="Roboto"/>
-              </a:rPr>
-              <a:t>4</a:t>
-            </a:r>
-            <a:r>
-              <a:rPr lang="en-US" sz="1500" b="1" dirty="0">
-                <a:latin typeface="Roboto"/>
-                <a:ea typeface="Roboto"/>
-                <a:cs typeface="Roboto"/>
-                <a:sym typeface="Roboto"/>
-              </a:rPr>
-              <a:t>-</a:t>
-            </a:r>
-            <a:r>
-              <a:rPr lang="ru-RU" sz="1500" b="1" dirty="0">
-                <a:latin typeface="Roboto"/>
-                <a:ea typeface="Roboto"/>
-                <a:cs typeface="Roboto"/>
-                <a:sym typeface="Roboto"/>
-              </a:rPr>
-              <a:t>0</a:t>
-            </a:r>
-            <a:r>
-              <a:rPr lang="en-US" sz="1500" b="1" dirty="0">
-                <a:latin typeface="Roboto"/>
-                <a:ea typeface="Roboto"/>
-                <a:cs typeface="Roboto"/>
-                <a:sym typeface="Roboto"/>
-              </a:rPr>
-              <a:t>9</a:t>
             </a:r>
             <a:endParaRPr sz="1500" dirty="0">
               <a:latin typeface="Roboto"/>

--- a/RL/Course-project/Course project.pptx
+++ b/RL/Course-project/Course project.pptx
@@ -131,7 +131,7 @@
           <a:p>
             <a:fld id="{CED1C788-56A1-2E45-A024-5C42A74F7F0E}" type="datetimeFigureOut">
               <a:rPr lang="en-US" smtClean="0"/>
-              <a:t>2/25/25</a:t>
+              <a:t>5/23/25</a:t>
             </a:fld>
             <a:endParaRPr lang="en-US"/>
           </a:p>
@@ -2077,7 +2077,7 @@
           <a:p>
             <a:fld id="{1D8BD707-D9CF-40AE-B4C6-C98DA3205C09}" type="datetimeFigureOut">
               <a:rPr lang="en-US"/>
-              <a:t>2/25/25</a:t>
+              <a:t>5/23/25</a:t>
             </a:fld>
             <a:endParaRPr lang="en-US"/>
           </a:p>
@@ -2254,7 +2254,7 @@
           <a:p>
             <a:fld id="{1D8BD707-D9CF-40AE-B4C6-C98DA3205C09}" type="datetimeFigureOut">
               <a:rPr lang="en-US"/>
-              <a:t>2/25/25</a:t>
+              <a:t>5/23/25</a:t>
             </a:fld>
             <a:endParaRPr lang="en-US"/>
           </a:p>
@@ -2480,7 +2480,7 @@
           <a:p>
             <a:fld id="{1D8BD707-D9CF-40AE-B4C6-C98DA3205C09}" type="datetimeFigureOut">
               <a:rPr lang="en-US"/>
-              <a:t>2/25/25</a:t>
+              <a:t>5/23/25</a:t>
             </a:fld>
             <a:endParaRPr lang="en-US"/>
           </a:p>
@@ -2658,7 +2658,7 @@
           <a:p>
             <a:fld id="{1D8BD707-D9CF-40AE-B4C6-C98DA3205C09}" type="datetimeFigureOut">
               <a:rPr lang="en-US"/>
-              <a:t>2/25/25</a:t>
+              <a:t>5/23/25</a:t>
             </a:fld>
             <a:endParaRPr lang="en-US"/>
           </a:p>
@@ -2777,7 +2777,7 @@
           <a:p>
             <a:fld id="{1D8BD707-D9CF-40AE-B4C6-C98DA3205C09}" type="datetimeFigureOut">
               <a:rPr lang="en-US"/>
-              <a:t>2/25/25</a:t>
+              <a:t>5/23/25</a:t>
             </a:fld>
             <a:endParaRPr lang="en-US"/>
           </a:p>
@@ -4929,7 +4929,7 @@
           <a:p>
             <a:fld id="{1D8BD707-D9CF-40AE-B4C6-C98DA3205C09}" type="datetimeFigureOut">
               <a:rPr lang="en-US"/>
-              <a:t>2/25/25</a:t>
+              <a:t>5/23/25</a:t>
             </a:fld>
             <a:endParaRPr lang="en-US"/>
           </a:p>
@@ -5680,7 +5680,7 @@
                 <a:latin typeface="Calibri"/>
                 <a:cs typeface="Calibri"/>
               </a:rPr>
-              <a:t>25</a:t>
+              <a:t>23</a:t>
             </a:r>
             <a:r>
               <a:rPr sz="1400" dirty="0">
@@ -5694,7 +5694,7 @@
                 <a:latin typeface="Calibri"/>
                 <a:cs typeface="Calibri"/>
               </a:rPr>
-              <a:t>02</a:t>
+              <a:t>05</a:t>
             </a:r>
             <a:r>
               <a:rPr sz="1400" spc="-40" dirty="0">
@@ -5731,7 +5731,7 @@
         </p:nvSpPr>
         <p:spPr>
           <a:xfrm>
-            <a:off x="1233721" y="3509770"/>
+            <a:off x="1227882" y="4024318"/>
             <a:ext cx="526415" cy="228268"/>
           </a:xfrm>
           <a:prstGeom prst="rect">
@@ -5757,7 +5757,7 @@
                 <a:latin typeface="Calibri"/>
                 <a:cs typeface="Calibri"/>
               </a:rPr>
-              <a:t>17</a:t>
+              <a:t>21</a:t>
             </a:r>
             <a:r>
               <a:rPr sz="1400" dirty="0">
@@ -5778,7 +5778,7 @@
                 <a:latin typeface="Calibri"/>
                 <a:cs typeface="Calibri"/>
               </a:rPr>
-              <a:t>4</a:t>
+              <a:t>7</a:t>
             </a:r>
             <a:r>
               <a:rPr sz="1400" spc="-35" dirty="0">
@@ -5901,7 +5901,7 @@
         </p:nvSpPr>
         <p:spPr>
           <a:xfrm>
-            <a:off x="2225090" y="3445335"/>
+            <a:off x="2225090" y="3940332"/>
             <a:ext cx="3051175" cy="396240"/>
           </a:xfrm>
           <a:prstGeom prst="roundRect">
@@ -5965,7 +5965,7 @@
         </p:nvSpPr>
         <p:spPr>
           <a:xfrm>
-            <a:off x="2225090" y="2922971"/>
+            <a:off x="2225090" y="3425784"/>
             <a:ext cx="3051175" cy="396240"/>
           </a:xfrm>
           <a:prstGeom prst="roundRect">
@@ -6244,8 +6244,8 @@
         </p:nvCxnSpPr>
         <p:spPr>
           <a:xfrm rot="16200000" flipH="1">
-            <a:off x="1310725" y="2206725"/>
-            <a:ext cx="1489427" cy="339303"/>
+            <a:off x="1059318" y="2458132"/>
+            <a:ext cx="1992240" cy="339303"/>
           </a:xfrm>
           <a:prstGeom prst="bentConnector2">
             <a:avLst/>
@@ -6287,8 +6287,8 @@
         </p:nvCxnSpPr>
         <p:spPr>
           <a:xfrm rot="16200000" flipH="1">
-            <a:off x="1049543" y="2467907"/>
-            <a:ext cx="2011791" cy="339303"/>
+            <a:off x="802044" y="2715406"/>
+            <a:ext cx="2506788" cy="339303"/>
           </a:xfrm>
           <a:prstGeom prst="bentConnector2">
             <a:avLst/>
@@ -6531,8 +6531,8 @@
         </p:nvSpPr>
         <p:spPr>
           <a:xfrm>
-            <a:off x="1233721" y="2973886"/>
-            <a:ext cx="595079" cy="228268"/>
+            <a:off x="1233722" y="2973886"/>
+            <a:ext cx="511866" cy="228268"/>
           </a:xfrm>
           <a:prstGeom prst="rect">
             <a:avLst/>
@@ -6544,7 +6544,7 @@
           </a:bodyPr>
           <a:lstStyle/>
           <a:p>
-            <a:pPr marL="12700">
+            <a:pPr marL="12700" algn="r">
               <a:lnSpc>
                 <a:spcPct val="100000"/>
               </a:lnSpc>
@@ -6553,64 +6553,14 @@
               </a:spcBef>
             </a:pPr>
             <a:r>
-              <a:rPr lang="ru-RU" sz="1400" dirty="0">
+              <a:rPr lang="ru-RU" sz="1400" spc="-50" dirty="0">
                 <a:solidFill>
                   <a:srgbClr val="FF0000"/>
                 </a:solidFill>
                 <a:latin typeface="Calibri"/>
                 <a:cs typeface="Calibri"/>
               </a:rPr>
-              <a:t>16</a:t>
-            </a:r>
-            <a:r>
-              <a:rPr sz="1400" dirty="0">
-                <a:solidFill>
-                  <a:srgbClr val="FF0000"/>
-                </a:solidFill>
-                <a:latin typeface="Calibri"/>
-                <a:cs typeface="Calibri"/>
-              </a:rPr>
-              <a:t>.</a:t>
-            </a:r>
-            <a:r>
-              <a:rPr lang="en-US" sz="1400" dirty="0">
-                <a:solidFill>
-                  <a:srgbClr val="FF0000"/>
-                </a:solidFill>
-                <a:latin typeface="Calibri"/>
-                <a:cs typeface="Calibri"/>
-              </a:rPr>
-              <a:t>0</a:t>
-            </a:r>
-            <a:r>
-              <a:rPr lang="ru-RU" sz="1400" dirty="0">
-                <a:solidFill>
-                  <a:srgbClr val="FF0000"/>
-                </a:solidFill>
-                <a:latin typeface="Calibri"/>
-                <a:cs typeface="Calibri"/>
-              </a:rPr>
-              <a:t>4</a:t>
-            </a:r>
-            <a:r>
-              <a:rPr sz="1400" spc="-35" dirty="0">
-                <a:solidFill>
-                  <a:srgbClr val="FF0000"/>
-                </a:solidFill>
-                <a:latin typeface="Calibri"/>
-                <a:cs typeface="Calibri"/>
-              </a:rPr>
-              <a:t> </a:t>
-            </a:r>
-            <a:r>
-              <a:rPr lang="ru-RU" sz="1400" spc="-50" dirty="0">
-                <a:solidFill>
-                  <a:srgbClr val="FF0000"/>
-                </a:solidFill>
-                <a:latin typeface="Calibri"/>
-                <a:cs typeface="Calibri"/>
-              </a:rPr>
-              <a:t>?</a:t>
+              <a:t>09.07 ?</a:t>
             </a:r>
             <a:endParaRPr sz="1400" dirty="0">
               <a:solidFill>
@@ -6665,7 +6615,7 @@
                 <a:latin typeface="Calibri"/>
                 <a:cs typeface="Calibri"/>
               </a:rPr>
-              <a:t>01</a:t>
+              <a:t>02</a:t>
             </a:r>
             <a:r>
               <a:rPr sz="1400" dirty="0">
@@ -6695,7 +6645,7 @@
                 <a:latin typeface="Calibri"/>
                 <a:cs typeface="Calibri"/>
               </a:rPr>
-              <a:t>4</a:t>
+              <a:t>7</a:t>
             </a:r>
             <a:r>
               <a:rPr sz="1400" spc="-35" dirty="0">
@@ -6716,6 +6666,125 @@
                 <a:cs typeface="Calibri"/>
               </a:rPr>
               <a:t>?</a:t>
+            </a:r>
+            <a:endParaRPr sz="1400" dirty="0">
+              <a:solidFill>
+                <a:srgbClr val="FF0000"/>
+              </a:solidFill>
+              <a:latin typeface="Calibri"/>
+              <a:cs typeface="Calibri"/>
+            </a:endParaRPr>
+          </a:p>
+        </p:txBody>
+      </p:sp>
+      <p:sp>
+        <p:nvSpPr>
+          <p:cNvPr id="22" name="Rounded Rectangle 21">
+            <a:extLst>
+              <a:ext uri="{FF2B5EF4-FFF2-40B4-BE49-F238E27FC236}">
+                <a16:creationId xmlns:a16="http://schemas.microsoft.com/office/drawing/2014/main" id="{665A0849-BB03-E046-8A1C-FF655C8D321D}"/>
+              </a:ext>
+            </a:extLst>
+          </p:cNvPr>
+          <p:cNvSpPr/>
+          <p:nvPr/>
+        </p:nvSpPr>
+        <p:spPr>
+          <a:xfrm>
+            <a:off x="2225089" y="2911236"/>
+            <a:ext cx="3051175" cy="396240"/>
+          </a:xfrm>
+          <a:prstGeom prst="roundRect">
+            <a:avLst/>
+          </a:prstGeom>
+          <a:solidFill>
+            <a:srgbClr val="FFD966"/>
+          </a:solidFill>
+          <a:ln>
+            <a:noFill/>
+          </a:ln>
+        </p:spPr>
+        <p:style>
+          <a:lnRef idx="2">
+            <a:schemeClr val="accent1">
+              <a:shade val="50000"/>
+            </a:schemeClr>
+          </a:lnRef>
+          <a:fillRef idx="1">
+            <a:schemeClr val="accent1"/>
+          </a:fillRef>
+          <a:effectRef idx="0">
+            <a:schemeClr val="accent1"/>
+          </a:effectRef>
+          <a:fontRef idx="minor">
+            <a:schemeClr val="lt1"/>
+          </a:fontRef>
+        </p:style>
+        <p:txBody>
+          <a:bodyPr rtlCol="0" anchor="ctr"/>
+          <a:lstStyle/>
+          <a:p>
+            <a:pPr algn="l"/>
+            <a:r>
+              <a:rPr lang="ru-RU" sz="1400" dirty="0">
+                <a:solidFill>
+                  <a:schemeClr val="tx1"/>
+                </a:solidFill>
+              </a:rPr>
+              <a:t>Предзащита проектных работ</a:t>
+            </a:r>
+            <a:endParaRPr lang="en-US" sz="1400" dirty="0">
+              <a:solidFill>
+                <a:schemeClr val="tx1"/>
+              </a:solidFill>
+            </a:endParaRPr>
+          </a:p>
+        </p:txBody>
+      </p:sp>
+      <p:sp>
+        <p:nvSpPr>
+          <p:cNvPr id="30" name="object 22">
+            <a:extLst>
+              <a:ext uri="{FF2B5EF4-FFF2-40B4-BE49-F238E27FC236}">
+                <a16:creationId xmlns:a16="http://schemas.microsoft.com/office/drawing/2014/main" id="{AF011DD3-9B99-C64A-8471-D77E4A53FB4F}"/>
+              </a:ext>
+            </a:extLst>
+          </p:cNvPr>
+          <p:cNvSpPr txBox="1"/>
+          <p:nvPr/>
+        </p:nvSpPr>
+        <p:spPr>
+          <a:xfrm>
+            <a:off x="1227882" y="3504400"/>
+            <a:ext cx="511866" cy="228268"/>
+          </a:xfrm>
+          <a:prstGeom prst="rect">
+            <a:avLst/>
+          </a:prstGeom>
+        </p:spPr>
+        <p:txBody>
+          <a:bodyPr vert="horz" wrap="square" lIns="0" tIns="12700" rIns="0" bIns="0" rtlCol="0">
+            <a:spAutoFit/>
+          </a:bodyPr>
+          <a:lstStyle/>
+          <a:p>
+            <a:pPr marL="12700" algn="r">
+              <a:lnSpc>
+                <a:spcPct val="100000"/>
+              </a:lnSpc>
+              <a:spcBef>
+                <a:spcPts val="100"/>
+              </a:spcBef>
+            </a:pPr>
+            <a:r>
+              <a:rPr lang="ru-RU" sz="1400" spc="-50" dirty="0">
+                <a:solidFill>
+                  <a:srgbClr val="FF0000"/>
+                </a:solidFill>
+                <a:latin typeface="Calibri"/>
+                <a:cs typeface="Calibri"/>
+              </a:rPr>
+              <a:t>17.07 ?</a:t>
             </a:r>
             <a:endParaRPr sz="1400" dirty="0">
               <a:solidFill>

--- a/RL/Course-project/Course project.pptx
+++ b/RL/Course-project/Course project.pptx
@@ -131,7 +131,7 @@
           <a:p>
             <a:fld id="{CED1C788-56A1-2E45-A024-5C42A74F7F0E}" type="datetimeFigureOut">
               <a:rPr lang="en-US" smtClean="0"/>
-              <a:t>5/23/25</a:t>
+              <a:t>12/18/25</a:t>
             </a:fld>
             <a:endParaRPr lang="en-US"/>
           </a:p>
@@ -2077,7 +2077,7 @@
           <a:p>
             <a:fld id="{1D8BD707-D9CF-40AE-B4C6-C98DA3205C09}" type="datetimeFigureOut">
               <a:rPr lang="en-US"/>
-              <a:t>5/23/25</a:t>
+              <a:t>12/18/25</a:t>
             </a:fld>
             <a:endParaRPr lang="en-US"/>
           </a:p>
@@ -2254,7 +2254,7 @@
           <a:p>
             <a:fld id="{1D8BD707-D9CF-40AE-B4C6-C98DA3205C09}" type="datetimeFigureOut">
               <a:rPr lang="en-US"/>
-              <a:t>5/23/25</a:t>
+              <a:t>12/18/25</a:t>
             </a:fld>
             <a:endParaRPr lang="en-US"/>
           </a:p>
@@ -2480,7 +2480,7 @@
           <a:p>
             <a:fld id="{1D8BD707-D9CF-40AE-B4C6-C98DA3205C09}" type="datetimeFigureOut">
               <a:rPr lang="en-US"/>
-              <a:t>5/23/25</a:t>
+              <a:t>12/18/25</a:t>
             </a:fld>
             <a:endParaRPr lang="en-US"/>
           </a:p>
@@ -2658,7 +2658,7 @@
           <a:p>
             <a:fld id="{1D8BD707-D9CF-40AE-B4C6-C98DA3205C09}" type="datetimeFigureOut">
               <a:rPr lang="en-US"/>
-              <a:t>5/23/25</a:t>
+              <a:t>12/18/25</a:t>
             </a:fld>
             <a:endParaRPr lang="en-US"/>
           </a:p>
@@ -2777,7 +2777,7 @@
           <a:p>
             <a:fld id="{1D8BD707-D9CF-40AE-B4C6-C98DA3205C09}" type="datetimeFigureOut">
               <a:rPr lang="en-US"/>
-              <a:t>5/23/25</a:t>
+              <a:t>12/18/25</a:t>
             </a:fld>
             <a:endParaRPr lang="en-US"/>
           </a:p>
@@ -4929,7 +4929,7 @@
           <a:p>
             <a:fld id="{1D8BD707-D9CF-40AE-B4C6-C98DA3205C09}" type="datetimeFigureOut">
               <a:rPr lang="en-US"/>
-              <a:t>5/23/25</a:t>
+              <a:t>12/18/25</a:t>
             </a:fld>
             <a:endParaRPr lang="en-US"/>
           </a:p>
@@ -5680,7 +5680,7 @@
                 <a:latin typeface="Calibri"/>
                 <a:cs typeface="Calibri"/>
               </a:rPr>
-              <a:t>23</a:t>
+              <a:t>18</a:t>
             </a:r>
             <a:r>
               <a:rPr sz="1400" dirty="0">
@@ -5694,7 +5694,7 @@
                 <a:latin typeface="Calibri"/>
                 <a:cs typeface="Calibri"/>
               </a:rPr>
-              <a:t>05</a:t>
+              <a:t>12</a:t>
             </a:r>
             <a:r>
               <a:rPr sz="1400" spc="-40" dirty="0">
@@ -5757,7 +5757,7 @@
                 <a:latin typeface="Calibri"/>
                 <a:cs typeface="Calibri"/>
               </a:rPr>
-              <a:t>21</a:t>
+              <a:t>25</a:t>
             </a:r>
             <a:r>
               <a:rPr sz="1400" dirty="0">
@@ -5778,7 +5778,7 @@
                 <a:latin typeface="Calibri"/>
                 <a:cs typeface="Calibri"/>
               </a:rPr>
-              <a:t>7</a:t>
+              <a:t>3</a:t>
             </a:r>
             <a:r>
               <a:rPr sz="1400" spc="-35" dirty="0">
@@ -6531,8 +6531,8 @@
         </p:nvSpPr>
         <p:spPr>
           <a:xfrm>
-            <a:off x="1233722" y="2973886"/>
-            <a:ext cx="511866" cy="228268"/>
+            <a:off x="685800" y="2973886"/>
+            <a:ext cx="1059788" cy="228268"/>
           </a:xfrm>
           <a:prstGeom prst="rect">
             <a:avLst/>
@@ -6560,7 +6560,7 @@
                 <a:latin typeface="Calibri"/>
                 <a:cs typeface="Calibri"/>
               </a:rPr>
-              <a:t>09.07 ?</a:t>
+              <a:t>12.03 / 13.03</a:t>
             </a:r>
             <a:endParaRPr sz="1400" dirty="0">
               <a:solidFill>
@@ -6586,8 +6586,8 @@
         </p:nvSpPr>
         <p:spPr>
           <a:xfrm>
-            <a:off x="1227882" y="2477676"/>
-            <a:ext cx="595079" cy="228268"/>
+            <a:off x="838200" y="2477676"/>
+            <a:ext cx="984761" cy="228268"/>
           </a:xfrm>
           <a:prstGeom prst="rect">
             <a:avLst/>
@@ -6608,7 +6608,27 @@
               </a:spcBef>
             </a:pPr>
             <a:r>
-              <a:rPr lang="ru-RU" sz="1400" dirty="0">
+              <a:rPr lang="en-US" sz="1400" dirty="0">
+                <a:solidFill>
+                  <a:srgbClr val="FF0000"/>
+                </a:solidFill>
+                <a:latin typeface="Calibri"/>
+                <a:cs typeface="Calibri"/>
+              </a:rPr>
+              <a:t>18</a:t>
+            </a:r>
+            <a:r>
+              <a:rPr sz="1400" dirty="0">
+                <a:solidFill>
+                  <a:srgbClr val="FF0000"/>
+                </a:solidFill>
+                <a:latin typeface="Calibri"/>
+                <a:cs typeface="Calibri"/>
+              </a:rPr>
+              <a:t>.</a:t>
+            </a:r>
+            <a:r>
+              <a:rPr lang="en-US" sz="1400" dirty="0">
                 <a:solidFill>
                   <a:srgbClr val="FF0000"/>
                 </a:solidFill>
@@ -6618,36 +6638,6 @@
               <a:t>02</a:t>
             </a:r>
             <a:r>
-              <a:rPr sz="1400" dirty="0">
-                <a:solidFill>
-                  <a:srgbClr val="FF0000"/>
-                </a:solidFill>
-                <a:latin typeface="Calibri"/>
-                <a:cs typeface="Calibri"/>
-              </a:rPr>
-              <a:t>.</a:t>
-            </a:r>
-            <a:r>
-              <a:rPr lang="en-US" sz="1400" dirty="0">
-                <a:solidFill>
-                  <a:srgbClr val="FF0000"/>
-                </a:solidFill>
-                <a:latin typeface="Calibri"/>
-                <a:cs typeface="Calibri"/>
-              </a:rPr>
-              <a:t>0</a:t>
-            </a:r>
-            <a:r>
-              <a:rPr lang="ru-RU" sz="1400" dirty="0">
-                <a:solidFill>
-                  <a:srgbClr val="FF0000"/>
-                </a:solidFill>
-                <a:latin typeface="Calibri"/>
-                <a:cs typeface="Calibri"/>
-              </a:rPr>
-              <a:t>7</a:t>
-            </a:r>
-            <a:r>
               <a:rPr sz="1400" spc="-35" dirty="0">
                 <a:solidFill>
                   <a:srgbClr val="FF0000"/>
@@ -6658,14 +6648,14 @@
               <a:t> </a:t>
             </a:r>
             <a:r>
-              <a:rPr lang="ru-RU" sz="1400" spc="-50" dirty="0">
+              <a:rPr lang="en-US" sz="1400" spc="-50" dirty="0">
                 <a:solidFill>
                   <a:srgbClr val="FF0000"/>
                 </a:solidFill>
                 <a:latin typeface="Calibri"/>
                 <a:cs typeface="Calibri"/>
               </a:rPr>
-              <a:t>?</a:t>
+              <a:t>/ 20.02</a:t>
             </a:r>
             <a:endParaRPr sz="1400" dirty="0">
               <a:solidFill>
@@ -6755,8 +6745,8 @@
         </p:nvSpPr>
         <p:spPr>
           <a:xfrm>
-            <a:off x="1227882" y="3504400"/>
-            <a:ext cx="511866" cy="228268"/>
+            <a:off x="738335" y="3504400"/>
+            <a:ext cx="1001413" cy="228268"/>
           </a:xfrm>
           <a:prstGeom prst="rect">
             <a:avLst/>
@@ -6784,7 +6774,7 @@
                 <a:latin typeface="Calibri"/>
                 <a:cs typeface="Calibri"/>
               </a:rPr>
-              <a:t>17.07 ?</a:t>
+              <a:t>20.03 / 24.03</a:t>
             </a:r>
             <a:endParaRPr sz="1400" dirty="0">
               <a:solidFill>
@@ -8084,7 +8074,15 @@
             <a:pPr rtl="0"/>
             <a:r>
               <a:rPr lang="ru-RU" sz="1150" kern="0" dirty="0"/>
-              <a:t>Более 15 лет занимался прикладной математикой и мат моделированием</a:t>
+              <a:t>Более </a:t>
+            </a:r>
+            <a:r>
+              <a:rPr lang="en-US" sz="1150" kern="0" dirty="0"/>
+              <a:t>20</a:t>
+            </a:r>
+            <a:r>
+              <a:rPr lang="ru-RU" sz="1150" kern="0" dirty="0"/>
+              <a:t> лет занимался прикладной математикой и мат моделированием</a:t>
             </a:r>
           </a:p>
           <a:p>
@@ -8098,9 +8096,10 @@
               <a:t>Data Scientist) (Python, </a:t>
             </a:r>
             <a:r>
-              <a:rPr lang="ru-RU" sz="1150" kern="0" dirty="0"/>
-              <a:t>С++) в НИИ ПАО Газпром</a:t>
-            </a:r>
+              <a:rPr lang="ru-RU" sz="1150" kern="0"/>
+              <a:t>С++)</a:t>
+            </a:r>
+            <a:endParaRPr lang="ru-RU" sz="1150" kern="0" dirty="0"/>
           </a:p>
           <a:p>
             <a:pPr rtl="0"/>
@@ -9985,7 +9984,7 @@
             </a:r>
             <a:r>
               <a:rPr lang="ru" sz="1150" dirty="0"/>
-              <a:t>олее 15 лет занимался прикладной математикой и мат моделированием</a:t>
+              <a:t>олее 20 лет занимался прикладной математикой и мат моделированием</a:t>
             </a:r>
           </a:p>
           <a:p>
@@ -10003,7 +10002,7 @@
             </a:pPr>
             <a:r>
               <a:rPr lang="ru" sz="1150" dirty="0"/>
-              <a:t>(Data Scientist) (Python, С++) в НИИ ПАО Газпром</a:t>
+              <a:t>(Data Scientist) (Python, С++)</a:t>
             </a:r>
             <a:endParaRPr sz="1150" dirty="0"/>
           </a:p>

--- a/RL/Course-project/Course project.pptx
+++ b/RL/Course-project/Course project.pptx
@@ -131,7 +131,7 @@
           <a:p>
             <a:fld id="{CED1C788-56A1-2E45-A024-5C42A74F7F0E}" type="datetimeFigureOut">
               <a:rPr lang="en-US" smtClean="0"/>
-              <a:t>12/18/25</a:t>
+              <a:t>4/3/26</a:t>
             </a:fld>
             <a:endParaRPr lang="en-US"/>
           </a:p>
@@ -2077,7 +2077,7 @@
           <a:p>
             <a:fld id="{1D8BD707-D9CF-40AE-B4C6-C98DA3205C09}" type="datetimeFigureOut">
               <a:rPr lang="en-US"/>
-              <a:t>12/18/25</a:t>
+              <a:t>4/3/26</a:t>
             </a:fld>
             <a:endParaRPr lang="en-US"/>
           </a:p>
@@ -2254,7 +2254,7 @@
           <a:p>
             <a:fld id="{1D8BD707-D9CF-40AE-B4C6-C98DA3205C09}" type="datetimeFigureOut">
               <a:rPr lang="en-US"/>
-              <a:t>12/18/25</a:t>
+              <a:t>4/3/26</a:t>
             </a:fld>
             <a:endParaRPr lang="en-US"/>
           </a:p>
@@ -2480,7 +2480,7 @@
           <a:p>
             <a:fld id="{1D8BD707-D9CF-40AE-B4C6-C98DA3205C09}" type="datetimeFigureOut">
               <a:rPr lang="en-US"/>
-              <a:t>12/18/25</a:t>
+              <a:t>4/3/26</a:t>
             </a:fld>
             <a:endParaRPr lang="en-US"/>
           </a:p>
@@ -2658,7 +2658,7 @@
           <a:p>
             <a:fld id="{1D8BD707-D9CF-40AE-B4C6-C98DA3205C09}" type="datetimeFigureOut">
               <a:rPr lang="en-US"/>
-              <a:t>12/18/25</a:t>
+              <a:t>4/3/26</a:t>
             </a:fld>
             <a:endParaRPr lang="en-US"/>
           </a:p>
@@ -2777,7 +2777,7 @@
           <a:p>
             <a:fld id="{1D8BD707-D9CF-40AE-B4C6-C98DA3205C09}" type="datetimeFigureOut">
               <a:rPr lang="en-US"/>
-              <a:t>12/18/25</a:t>
+              <a:t>4/3/26</a:t>
             </a:fld>
             <a:endParaRPr lang="en-US"/>
           </a:p>
@@ -4929,7 +4929,7 @@
           <a:p>
             <a:fld id="{1D8BD707-D9CF-40AE-B4C6-C98DA3205C09}" type="datetimeFigureOut">
               <a:rPr lang="en-US"/>
-              <a:t>12/18/25</a:t>
+              <a:t>4/3/26</a:t>
             </a:fld>
             <a:endParaRPr lang="en-US"/>
           </a:p>
@@ -5676,11 +5676,11 @@
               </a:spcBef>
             </a:pPr>
             <a:r>
-              <a:rPr lang="ru-RU" sz="1400" dirty="0">
+              <a:rPr lang="en-US" sz="1400" dirty="0">
                 <a:latin typeface="Calibri"/>
                 <a:cs typeface="Calibri"/>
               </a:rPr>
-              <a:t>18</a:t>
+              <a:t>03</a:t>
             </a:r>
             <a:r>
               <a:rPr sz="1400" dirty="0">
@@ -5690,11 +5690,11 @@
               <a:t>.</a:t>
             </a:r>
             <a:r>
-              <a:rPr lang="ru-RU" sz="1400" dirty="0">
+              <a:rPr lang="en-US" sz="1400" dirty="0">
                 <a:latin typeface="Calibri"/>
                 <a:cs typeface="Calibri"/>
               </a:rPr>
-              <a:t>12</a:t>
+              <a:t>04</a:t>
             </a:r>
             <a:r>
               <a:rPr sz="1400" spc="-40" dirty="0">
@@ -5753,11 +5753,11 @@
               </a:spcBef>
             </a:pPr>
             <a:r>
-              <a:rPr lang="ru-RU" sz="1400" dirty="0">
+              <a:rPr lang="en-US" sz="1400" dirty="0">
                 <a:latin typeface="Calibri"/>
                 <a:cs typeface="Calibri"/>
               </a:rPr>
-              <a:t>25</a:t>
+              <a:t>30</a:t>
             </a:r>
             <a:r>
               <a:rPr sz="1400" dirty="0">
@@ -5771,14 +5771,7 @@
                 <a:latin typeface="Calibri"/>
                 <a:cs typeface="Calibri"/>
               </a:rPr>
-              <a:t>0</a:t>
-            </a:r>
-            <a:r>
-              <a:rPr lang="ru-RU" sz="1400" dirty="0">
-                <a:latin typeface="Calibri"/>
-                <a:cs typeface="Calibri"/>
-              </a:rPr>
-              <a:t>3</a:t>
+              <a:t>05</a:t>
             </a:r>
             <a:r>
               <a:rPr sz="1400" spc="-35" dirty="0">
@@ -6560,7 +6553,7 @@
                 <a:latin typeface="Calibri"/>
                 <a:cs typeface="Calibri"/>
               </a:rPr>
-              <a:t>12.03 / 13.03</a:t>
+              <a:t>21.05 - </a:t>
             </a:r>
             <a:endParaRPr sz="1400" dirty="0">
               <a:solidFill>
@@ -6586,7 +6579,7 @@
         </p:nvSpPr>
         <p:spPr>
           <a:xfrm>
-            <a:off x="838200" y="2477676"/>
+            <a:off x="769536" y="2479556"/>
             <a:ext cx="984761" cy="228268"/>
           </a:xfrm>
           <a:prstGeom prst="rect">
@@ -6599,7 +6592,7 @@
           </a:bodyPr>
           <a:lstStyle/>
           <a:p>
-            <a:pPr marL="12700">
+            <a:pPr marL="12700" algn="r">
               <a:lnSpc>
                 <a:spcPct val="100000"/>
               </a:lnSpc>
@@ -6615,47 +6608,37 @@
                 <a:latin typeface="Calibri"/>
                 <a:cs typeface="Calibri"/>
               </a:rPr>
-              <a:t>18</a:t>
-            </a:r>
-            <a:r>
-              <a:rPr sz="1400" dirty="0">
+              <a:t>1</a:t>
+            </a:r>
+            <a:r>
+              <a:rPr lang="ru-RU" sz="1400" dirty="0">
                 <a:solidFill>
                   <a:srgbClr val="FF0000"/>
                 </a:solidFill>
                 <a:latin typeface="Calibri"/>
                 <a:cs typeface="Calibri"/>
               </a:rPr>
-              <a:t>.</a:t>
-            </a:r>
-            <a:r>
-              <a:rPr lang="en-US" sz="1400" dirty="0">
+              <a:t>2</a:t>
+            </a:r>
+            <a:r>
+              <a:rPr lang="en-US" sz="1400" spc="-50" dirty="0">
                 <a:solidFill>
                   <a:srgbClr val="FF0000"/>
                 </a:solidFill>
                 <a:latin typeface="Calibri"/>
                 <a:cs typeface="Calibri"/>
               </a:rPr>
-              <a:t>02</a:t>
-            </a:r>
-            <a:r>
-              <a:rPr sz="1400" spc="-35" dirty="0">
+              <a:t>.0</a:t>
+            </a:r>
+            <a:r>
+              <a:rPr lang="ru-RU" sz="1400" spc="-50" dirty="0">
                 <a:solidFill>
                   <a:srgbClr val="FF0000"/>
                 </a:solidFill>
                 <a:latin typeface="Calibri"/>
                 <a:cs typeface="Calibri"/>
               </a:rPr>
-              <a:t> </a:t>
-            </a:r>
-            <a:r>
-              <a:rPr lang="en-US" sz="1400" spc="-50" dirty="0">
-                <a:solidFill>
-                  <a:srgbClr val="FF0000"/>
-                </a:solidFill>
-                <a:latin typeface="Calibri"/>
-                <a:cs typeface="Calibri"/>
-              </a:rPr>
-              <a:t>/ 20.02</a:t>
+              <a:t>5 - </a:t>
             </a:r>
             <a:endParaRPr sz="1400" dirty="0">
               <a:solidFill>
@@ -6774,7 +6757,17 @@
                 <a:latin typeface="Calibri"/>
                 <a:cs typeface="Calibri"/>
               </a:rPr>
-              <a:t>20.03 / 24.03</a:t>
+              <a:t>26.0</a:t>
+            </a:r>
+            <a:r>
+              <a:rPr lang="en-US" sz="1400" spc="-50" dirty="0">
+                <a:solidFill>
+                  <a:srgbClr val="FF0000"/>
+                </a:solidFill>
+                <a:latin typeface="Calibri"/>
+                <a:cs typeface="Calibri"/>
+              </a:rPr>
+              <a:t>5 - </a:t>
             </a:r>
             <a:endParaRPr sz="1400" dirty="0">
               <a:solidFill>
